--- a/contents/Module-11-Data-Import-and-Export.pptx
+++ b/contents/Module-11-Data-Import-and-Export.pptx
@@ -7463,7 +7463,7 @@
         <p:spPr>
           <a:xfrm>
             <a:off x="411480" y="1463040"/>
-            <a:ext cx="3639312" cy="4160520"/>
+            <a:ext cx="3639312" cy="3429000"/>
           </a:xfrm>
           <a:prstGeom prst="rect">
             <a:avLst/>
@@ -7541,7 +7541,7 @@
         <p:spPr>
           <a:xfrm>
             <a:off x="594360" y="2121408"/>
-            <a:ext cx="3291840" cy="3200400"/>
+            <a:ext cx="3291840" cy="2697480"/>
           </a:xfrm>
           <a:prstGeom prst="rect">
             <a:avLst/>
@@ -7579,7 +7579,7 @@
         <p:spPr>
           <a:xfrm>
             <a:off x="4325112" y="1463040"/>
-            <a:ext cx="3639312" cy="4160520"/>
+            <a:ext cx="3639312" cy="3429000"/>
           </a:xfrm>
           <a:prstGeom prst="rect">
             <a:avLst/>
@@ -7657,7 +7657,7 @@
         <p:spPr>
           <a:xfrm>
             <a:off x="4507992" y="2121408"/>
-            <a:ext cx="3291840" cy="3200400"/>
+            <a:ext cx="3291840" cy="2697480"/>
           </a:xfrm>
           <a:prstGeom prst="rect">
             <a:avLst/>
@@ -7695,7 +7695,7 @@
         <p:spPr>
           <a:xfrm>
             <a:off x="8238744" y="1463040"/>
-            <a:ext cx="3639312" cy="4160520"/>
+            <a:ext cx="3639312" cy="3429000"/>
           </a:xfrm>
           <a:prstGeom prst="rect">
             <a:avLst/>
@@ -7773,7 +7773,7 @@
         <p:spPr>
           <a:xfrm>
             <a:off x="8421624" y="2121408"/>
-            <a:ext cx="3291840" cy="3200400"/>
+            <a:ext cx="3291840" cy="2697480"/>
           </a:xfrm>
           <a:prstGeom prst="rect">
             <a:avLst/>
@@ -7810,7 +7810,7 @@
         </p:nvSpPr>
         <p:spPr>
           <a:xfrm>
-            <a:off x="411480" y="5742432"/>
+            <a:off x="411480" y="4956048"/>
             <a:ext cx="11384280" cy="347472"/>
           </a:xfrm>
           <a:prstGeom prst="rect">
@@ -7845,8 +7845,8 @@
         </p:nvSpPr>
         <p:spPr>
           <a:xfrm>
-            <a:off x="411480" y="6144768"/>
-            <a:ext cx="11384280" cy="566928"/>
+            <a:off x="411480" y="5376672"/>
+            <a:ext cx="11384280" cy="1024128"/>
           </a:xfrm>
           <a:prstGeom prst="rect">
             <a:avLst/>
@@ -7888,8 +7888,8 @@
         </p:nvSpPr>
         <p:spPr>
           <a:xfrm>
-            <a:off x="576072" y="6254496"/>
-            <a:ext cx="11055096" cy="347472"/>
+            <a:off x="576072" y="5486400"/>
+            <a:ext cx="11055096" cy="804672"/>
           </a:xfrm>
           <a:prstGeom prst="rect">
             <a:avLst/>
